--- a/fixtures/rules/accent-overuse--neg.pptx
+++ b/fixtures/rules/accent-overuse--neg.pptx
@@ -776,7 +776,7 @@
           <a:noFill/>
         </p:spPr>
         <p:txBody>
-          <a:bodyPr vert="horz" wrap="square" lIns="0" tIns="0" rIns="0" bIns="0" rtlCol="0" anchor="t">
+          <a:bodyPr vert="horz" wrap="square" lIns="0" tIns="0" rIns="0" bIns="18582" rtlCol="0" anchor="b">
             <a:noAutofit/>
           </a:bodyPr>
           <a:lstStyle>
@@ -1275,7 +1275,7 @@
           <a:noFill/>
         </p:spPr>
         <p:txBody>
-          <a:bodyPr vert="horz" wrap="square" lIns="0" tIns="0" rIns="0" bIns="0" rtlCol="0" anchor="t">
+          <a:bodyPr vert="horz" wrap="square" lIns="0" tIns="0" rIns="0" bIns="13514" rtlCol="0" anchor="b">
             <a:noAutofit/>
           </a:bodyPr>
           <a:lstStyle>
@@ -1456,7 +1456,7 @@
           <a:noFill/>
         </p:spPr>
         <p:txBody>
-          <a:bodyPr vert="horz" wrap="square" lIns="0" tIns="0" rIns="0" bIns="0" rtlCol="0" anchor="t">
+          <a:bodyPr vert="horz" wrap="square" lIns="0" tIns="0" rIns="0" bIns="13514" rtlCol="0" anchor="b">
             <a:noAutofit/>
           </a:bodyPr>
           <a:lstStyle>
@@ -1818,7 +1818,7 @@
           <a:noFill/>
         </p:spPr>
         <p:txBody>
-          <a:bodyPr vert="horz" wrap="square" lIns="0" tIns="0" rIns="0" bIns="0" rtlCol="0" anchor="t">
+          <a:bodyPr vert="horz" wrap="square" lIns="0" tIns="0" rIns="0" bIns="18582" rtlCol="0" anchor="b">
             <a:noAutofit/>
           </a:bodyPr>
           <a:lstStyle>

--- a/fixtures/rules/accent-overuse--neg.pptx
+++ b/fixtures/rules/accent-overuse--neg.pptx
@@ -776,7 +776,7 @@
           <a:noFill/>
         </p:spPr>
         <p:txBody>
-          <a:bodyPr vert="horz" wrap="square" lIns="0" tIns="0" rIns="0" bIns="18582" rtlCol="0" anchor="b">
+          <a:bodyPr vert="horz" wrap="square" lIns="0" tIns="0" rIns="0" bIns="41910" rtlCol="0" anchor="b">
             <a:noAutofit/>
           </a:bodyPr>
           <a:lstStyle>
@@ -1275,7 +1275,7 @@
           <a:noFill/>
         </p:spPr>
         <p:txBody>
-          <a:bodyPr vert="horz" wrap="square" lIns="0" tIns="0" rIns="0" bIns="13514" rtlCol="0" anchor="b">
+          <a:bodyPr vert="horz" wrap="square" lIns="0" tIns="0" rIns="0" bIns="30480" rtlCol="0" anchor="b">
             <a:noAutofit/>
           </a:bodyPr>
           <a:lstStyle>
@@ -1456,7 +1456,7 @@
           <a:noFill/>
         </p:spPr>
         <p:txBody>
-          <a:bodyPr vert="horz" wrap="square" lIns="0" tIns="0" rIns="0" bIns="13514" rtlCol="0" anchor="b">
+          <a:bodyPr vert="horz" wrap="square" lIns="0" tIns="0" rIns="0" bIns="30480" rtlCol="0" anchor="b">
             <a:noAutofit/>
           </a:bodyPr>
           <a:lstStyle>
@@ -1818,7 +1818,7 @@
           <a:noFill/>
         </p:spPr>
         <p:txBody>
-          <a:bodyPr vert="horz" wrap="square" lIns="0" tIns="0" rIns="0" bIns="18582" rtlCol="0" anchor="b">
+          <a:bodyPr vert="horz" wrap="square" lIns="0" tIns="0" rIns="0" bIns="41910" rtlCol="0" anchor="b">
             <a:noAutofit/>
           </a:bodyPr>
           <a:lstStyle>

--- a/fixtures/rules/accent-overuse--neg.pptx
+++ b/fixtures/rules/accent-overuse--neg.pptx
@@ -28,6 +28,7 @@
           <a:srgbClr val="111111"/>
         </a:solidFill>
         <a:latin typeface="+mn-lt"/>
+        <a:cs typeface="+mn-cs"/>
       </a:defRPr>
     </a:lvl1pPr>
     <a:lvl2pPr marL="0" indent="0" algn="l">
@@ -46,6 +47,7 @@
           <a:srgbClr val="111111"/>
         </a:solidFill>
         <a:latin typeface="+mn-lt"/>
+        <a:cs typeface="+mn-cs"/>
       </a:defRPr>
     </a:lvl2pPr>
     <a:lvl3pPr marL="0" indent="0" algn="l">
@@ -64,6 +66,7 @@
           <a:srgbClr val="111111"/>
         </a:solidFill>
         <a:latin typeface="+mn-lt"/>
+        <a:cs typeface="+mn-cs"/>
       </a:defRPr>
     </a:lvl3pPr>
     <a:lvl4pPr marL="0" indent="0" algn="l">
@@ -82,6 +85,7 @@
           <a:srgbClr val="111111"/>
         </a:solidFill>
         <a:latin typeface="+mn-lt"/>
+        <a:cs typeface="+mn-cs"/>
       </a:defRPr>
     </a:lvl4pPr>
     <a:lvl5pPr marL="0" indent="0" algn="l">
@@ -100,6 +104,7 @@
           <a:srgbClr val="111111"/>
         </a:solidFill>
         <a:latin typeface="+mn-lt"/>
+        <a:cs typeface="+mn-cs"/>
       </a:defRPr>
     </a:lvl5pPr>
     <a:lvl6pPr marL="0" indent="0" algn="l">
@@ -118,6 +123,7 @@
           <a:srgbClr val="111111"/>
         </a:solidFill>
         <a:latin typeface="+mn-lt"/>
+        <a:cs typeface="+mn-cs"/>
       </a:defRPr>
     </a:lvl6pPr>
     <a:lvl7pPr marL="0" indent="0" algn="l">
@@ -136,6 +142,7 @@
           <a:srgbClr val="111111"/>
         </a:solidFill>
         <a:latin typeface="+mn-lt"/>
+        <a:cs typeface="+mn-cs"/>
       </a:defRPr>
     </a:lvl7pPr>
     <a:lvl8pPr marL="0" indent="0" algn="l">
@@ -154,6 +161,7 @@
           <a:srgbClr val="111111"/>
         </a:solidFill>
         <a:latin typeface="+mn-lt"/>
+        <a:cs typeface="+mn-cs"/>
       </a:defRPr>
     </a:lvl8pPr>
     <a:lvl9pPr marL="0" indent="0" algn="l">
@@ -172,6 +180,7 @@
           <a:srgbClr val="111111"/>
         </a:solidFill>
         <a:latin typeface="+mn-lt"/>
+        <a:cs typeface="+mn-cs"/>
       </a:defRPr>
     </a:lvl9pPr>
   </p:defaultTextStyle>
@@ -796,6 +805,7 @@
                   <a:srgbClr val="111111"/>
                 </a:solidFill>
                 <a:latin typeface="+mj-lt"/>
+                <a:cs typeface="+mj-cs"/>
               </a:defRPr>
             </a:lvl1pPr>
           </a:lstStyle>
@@ -848,6 +858,7 @@
                   <a:srgbClr val="111111"/>
                 </a:solidFill>
                 <a:latin typeface="+mn-lt"/>
+                <a:cs typeface="+mn-cs"/>
               </a:defRPr>
             </a:lvl1pPr>
           </a:lstStyle>
@@ -900,6 +911,7 @@
                   <a:srgbClr val="5C5C5A"/>
                 </a:solidFill>
                 <a:latin typeface="+mn-lt"/>
+                <a:cs typeface="+mn-cs"/>
               </a:defRPr>
             </a:lvl1pPr>
           </a:lstStyle>
@@ -985,6 +997,7 @@
                   <a:srgbClr val="F2F2F0"/>
                 </a:solidFill>
                 <a:latin typeface="+mj-lt"/>
+                <a:cs typeface="+mj-cs"/>
               </a:defRPr>
             </a:lvl1pPr>
           </a:lstStyle>
@@ -1037,6 +1050,7 @@
                   <a:srgbClr val="E8422E"/>
                 </a:solidFill>
                 <a:latin typeface="+mn-lt"/>
+                <a:cs typeface="+mn-cs"/>
               </a:defRPr>
             </a:lvl1pPr>
           </a:lstStyle>
@@ -1114,6 +1128,7 @@
                   <a:srgbClr val="111111"/>
                 </a:solidFill>
                 <a:latin typeface="+mj-lt"/>
+                <a:cs typeface="+mj-cs"/>
               </a:defRPr>
             </a:lvl1pPr>
           </a:lstStyle>
@@ -1166,6 +1181,7 @@
                   <a:srgbClr val="111111"/>
                 </a:solidFill>
                 <a:latin typeface="+mn-lt"/>
+                <a:cs typeface="+mn-cs"/>
               </a:defRPr>
             </a:lvl1pPr>
           </a:lstStyle>
@@ -1218,6 +1234,7 @@
                   <a:srgbClr val="5C5C5A"/>
                 </a:solidFill>
                 <a:latin typeface="+mn-lt"/>
+                <a:cs typeface="+mn-cs"/>
               </a:defRPr>
             </a:lvl1pPr>
           </a:lstStyle>
@@ -1295,6 +1312,7 @@
                   <a:srgbClr val="111111"/>
                 </a:solidFill>
                 <a:latin typeface="+mj-lt"/>
+                <a:cs typeface="+mj-cs"/>
               </a:defRPr>
             </a:lvl1pPr>
           </a:lstStyle>
@@ -1347,6 +1365,7 @@
                   <a:srgbClr val="111111"/>
                 </a:solidFill>
                 <a:latin typeface="+mn-lt"/>
+                <a:cs typeface="+mn-cs"/>
               </a:defRPr>
             </a:lvl1pPr>
           </a:lstStyle>
@@ -1399,6 +1418,7 @@
                   <a:srgbClr val="5C5C5A"/>
                 </a:solidFill>
                 <a:latin typeface="+mn-lt"/>
+                <a:cs typeface="+mn-cs"/>
               </a:defRPr>
             </a:lvl1pPr>
           </a:lstStyle>
@@ -1476,6 +1496,7 @@
                   <a:srgbClr val="111111"/>
                 </a:solidFill>
                 <a:latin typeface="+mj-lt"/>
+                <a:cs typeface="+mj-cs"/>
               </a:defRPr>
             </a:lvl1pPr>
           </a:lstStyle>
@@ -1528,6 +1549,7 @@
                   <a:srgbClr val="111111"/>
                 </a:solidFill>
                 <a:latin typeface="+mn-lt"/>
+                <a:cs typeface="+mn-cs"/>
               </a:defRPr>
             </a:lvl1pPr>
           </a:lstStyle>
@@ -1580,6 +1602,7 @@
                   <a:srgbClr val="111111"/>
                 </a:solidFill>
                 <a:latin typeface="+mn-lt"/>
+                <a:cs typeface="+mn-cs"/>
               </a:defRPr>
             </a:lvl1pPr>
           </a:lstStyle>
@@ -1632,6 +1655,7 @@
                   <a:srgbClr val="5C5C5A"/>
                 </a:solidFill>
                 <a:latin typeface="+mn-lt"/>
+                <a:cs typeface="+mn-cs"/>
               </a:defRPr>
             </a:lvl1pPr>
           </a:lstStyle>
@@ -1709,6 +1733,7 @@
                   <a:srgbClr val="111111"/>
                 </a:solidFill>
                 <a:latin typeface="+mj-lt"/>
+                <a:cs typeface="+mj-cs"/>
               </a:defRPr>
             </a:lvl1pPr>
           </a:lstStyle>
@@ -1761,6 +1786,7 @@
                   <a:srgbClr val="5C5C5A"/>
                 </a:solidFill>
                 <a:latin typeface="+mn-lt"/>
+                <a:cs typeface="+mn-cs"/>
               </a:defRPr>
             </a:lvl1pPr>
           </a:lstStyle>
@@ -1838,6 +1864,7 @@
                   <a:srgbClr val="111111"/>
                 </a:solidFill>
                 <a:latin typeface="+mj-lt"/>
+                <a:cs typeface="+mj-cs"/>
               </a:defRPr>
             </a:lvl1pPr>
           </a:lstStyle>
@@ -1890,6 +1917,7 @@
                   <a:srgbClr val="111111"/>
                 </a:solidFill>
                 <a:latin typeface="+mn-lt"/>
+                <a:cs typeface="+mn-cs"/>
               </a:defRPr>
             </a:lvl1pPr>
           </a:lstStyle>
@@ -1942,6 +1970,7 @@
                   <a:srgbClr val="5C5C5A"/>
                 </a:solidFill>
                 <a:latin typeface="+mn-lt"/>
+                <a:cs typeface="+mn-cs"/>
               </a:defRPr>
             </a:lvl1pPr>
           </a:lstStyle>
@@ -2027,6 +2056,7 @@
                   <a:srgbClr val="111111"/>
                 </a:solidFill>
                 <a:latin typeface="+mj-lt"/>
+                <a:cs typeface="+mj-cs"/>
               </a:defRPr>
             </a:lvl1pPr>
           </a:lstStyle>
@@ -2079,6 +2109,7 @@
                   <a:srgbClr val="111111"/>
                 </a:solidFill>
                 <a:latin typeface="+mn-lt"/>
+                <a:cs typeface="+mn-cs"/>
               </a:defRPr>
             </a:lvl1pPr>
           </a:lstStyle>
@@ -2120,6 +2151,7 @@
             <a:srgbClr val="111111"/>
           </a:solidFill>
           <a:latin typeface="+mj-lt"/>
+          <a:cs typeface="+mj-cs"/>
         </a:defRPr>
       </a:lvl1pPr>
       <a:lvl2pPr marL="0" indent="0" algn="l">
@@ -2138,6 +2170,7 @@
             <a:srgbClr val="111111"/>
           </a:solidFill>
           <a:latin typeface="+mj-lt"/>
+          <a:cs typeface="+mj-cs"/>
         </a:defRPr>
       </a:lvl2pPr>
       <a:lvl3pPr marL="0" indent="0" algn="l">
@@ -2156,6 +2189,7 @@
             <a:srgbClr val="111111"/>
           </a:solidFill>
           <a:latin typeface="+mj-lt"/>
+          <a:cs typeface="+mj-cs"/>
         </a:defRPr>
       </a:lvl3pPr>
       <a:lvl4pPr marL="0" indent="0" algn="l">
@@ -2174,6 +2208,7 @@
             <a:srgbClr val="111111"/>
           </a:solidFill>
           <a:latin typeface="+mj-lt"/>
+          <a:cs typeface="+mj-cs"/>
         </a:defRPr>
       </a:lvl4pPr>
       <a:lvl5pPr marL="0" indent="0" algn="l">
@@ -2192,6 +2227,7 @@
             <a:srgbClr val="111111"/>
           </a:solidFill>
           <a:latin typeface="+mj-lt"/>
+          <a:cs typeface="+mj-cs"/>
         </a:defRPr>
       </a:lvl5pPr>
       <a:lvl6pPr marL="0" indent="0" algn="l">
@@ -2210,6 +2246,7 @@
             <a:srgbClr val="111111"/>
           </a:solidFill>
           <a:latin typeface="+mj-lt"/>
+          <a:cs typeface="+mj-cs"/>
         </a:defRPr>
       </a:lvl6pPr>
       <a:lvl7pPr marL="0" indent="0" algn="l">
@@ -2228,6 +2265,7 @@
             <a:srgbClr val="111111"/>
           </a:solidFill>
           <a:latin typeface="+mj-lt"/>
+          <a:cs typeface="+mj-cs"/>
         </a:defRPr>
       </a:lvl7pPr>
       <a:lvl8pPr marL="0" indent="0" algn="l">
@@ -2246,6 +2284,7 @@
             <a:srgbClr val="111111"/>
           </a:solidFill>
           <a:latin typeface="+mj-lt"/>
+          <a:cs typeface="+mj-cs"/>
         </a:defRPr>
       </a:lvl8pPr>
       <a:lvl9pPr marL="0" indent="0" algn="l">
@@ -2264,6 +2303,7 @@
             <a:srgbClr val="111111"/>
           </a:solidFill>
           <a:latin typeface="+mj-lt"/>
+          <a:cs typeface="+mj-cs"/>
         </a:defRPr>
       </a:lvl9pPr>
     </p:titleStyle>
@@ -2284,6 +2324,7 @@
             <a:srgbClr val="111111"/>
           </a:solidFill>
           <a:latin typeface="+mn-lt"/>
+          <a:cs typeface="+mn-cs"/>
         </a:defRPr>
       </a:lvl1pPr>
       <a:lvl2pPr marL="0" indent="0" algn="l">
@@ -2302,6 +2343,7 @@
             <a:srgbClr val="111111"/>
           </a:solidFill>
           <a:latin typeface="+mn-lt"/>
+          <a:cs typeface="+mn-cs"/>
         </a:defRPr>
       </a:lvl2pPr>
       <a:lvl3pPr marL="0" indent="0" algn="l">
@@ -2320,6 +2362,7 @@
             <a:srgbClr val="111111"/>
           </a:solidFill>
           <a:latin typeface="+mn-lt"/>
+          <a:cs typeface="+mn-cs"/>
         </a:defRPr>
       </a:lvl3pPr>
       <a:lvl4pPr marL="0" indent="0" algn="l">
@@ -2338,6 +2381,7 @@
             <a:srgbClr val="111111"/>
           </a:solidFill>
           <a:latin typeface="+mn-lt"/>
+          <a:cs typeface="+mn-cs"/>
         </a:defRPr>
       </a:lvl4pPr>
       <a:lvl5pPr marL="0" indent="0" algn="l">
@@ -2356,6 +2400,7 @@
             <a:srgbClr val="111111"/>
           </a:solidFill>
           <a:latin typeface="+mn-lt"/>
+          <a:cs typeface="+mn-cs"/>
         </a:defRPr>
       </a:lvl5pPr>
       <a:lvl6pPr marL="0" indent="0" algn="l">
@@ -2374,6 +2419,7 @@
             <a:srgbClr val="111111"/>
           </a:solidFill>
           <a:latin typeface="+mn-lt"/>
+          <a:cs typeface="+mn-cs"/>
         </a:defRPr>
       </a:lvl6pPr>
       <a:lvl7pPr marL="0" indent="0" algn="l">
@@ -2392,6 +2438,7 @@
             <a:srgbClr val="111111"/>
           </a:solidFill>
           <a:latin typeface="+mn-lt"/>
+          <a:cs typeface="+mn-cs"/>
         </a:defRPr>
       </a:lvl7pPr>
       <a:lvl8pPr marL="0" indent="0" algn="l">
@@ -2410,6 +2457,7 @@
             <a:srgbClr val="111111"/>
           </a:solidFill>
           <a:latin typeface="+mn-lt"/>
+          <a:cs typeface="+mn-cs"/>
         </a:defRPr>
       </a:lvl8pPr>
       <a:lvl9pPr marL="0" indent="0" algn="l">
@@ -2428,6 +2476,7 @@
             <a:srgbClr val="111111"/>
           </a:solidFill>
           <a:latin typeface="+mn-lt"/>
+          <a:cs typeface="+mn-cs"/>
         </a:defRPr>
       </a:lvl9pPr>
     </p:bodyStyle>
@@ -2448,6 +2497,7 @@
             <a:srgbClr val="111111"/>
           </a:solidFill>
           <a:latin typeface="+mn-lt"/>
+          <a:cs typeface="+mn-cs"/>
         </a:defRPr>
       </a:lvl1pPr>
       <a:lvl2pPr marL="0" indent="0" algn="l">
@@ -2466,6 +2516,7 @@
             <a:srgbClr val="111111"/>
           </a:solidFill>
           <a:latin typeface="+mn-lt"/>
+          <a:cs typeface="+mn-cs"/>
         </a:defRPr>
       </a:lvl2pPr>
       <a:lvl3pPr marL="0" indent="0" algn="l">
@@ -2484,6 +2535,7 @@
             <a:srgbClr val="111111"/>
           </a:solidFill>
           <a:latin typeface="+mn-lt"/>
+          <a:cs typeface="+mn-cs"/>
         </a:defRPr>
       </a:lvl3pPr>
       <a:lvl4pPr marL="0" indent="0" algn="l">
@@ -2502,6 +2554,7 @@
             <a:srgbClr val="111111"/>
           </a:solidFill>
           <a:latin typeface="+mn-lt"/>
+          <a:cs typeface="+mn-cs"/>
         </a:defRPr>
       </a:lvl4pPr>
       <a:lvl5pPr marL="0" indent="0" algn="l">
@@ -2520,6 +2573,7 @@
             <a:srgbClr val="111111"/>
           </a:solidFill>
           <a:latin typeface="+mn-lt"/>
+          <a:cs typeface="+mn-cs"/>
         </a:defRPr>
       </a:lvl5pPr>
       <a:lvl6pPr marL="0" indent="0" algn="l">
@@ -2538,6 +2592,7 @@
             <a:srgbClr val="111111"/>
           </a:solidFill>
           <a:latin typeface="+mn-lt"/>
+          <a:cs typeface="+mn-cs"/>
         </a:defRPr>
       </a:lvl6pPr>
       <a:lvl7pPr marL="0" indent="0" algn="l">
@@ -2556,6 +2611,7 @@
             <a:srgbClr val="111111"/>
           </a:solidFill>
           <a:latin typeface="+mn-lt"/>
+          <a:cs typeface="+mn-cs"/>
         </a:defRPr>
       </a:lvl7pPr>
       <a:lvl8pPr marL="0" indent="0" algn="l">
@@ -2574,6 +2630,7 @@
             <a:srgbClr val="111111"/>
           </a:solidFill>
           <a:latin typeface="+mn-lt"/>
+          <a:cs typeface="+mn-cs"/>
         </a:defRPr>
       </a:lvl8pPr>
       <a:lvl9pPr marL="0" indent="0" algn="l">
@@ -2592,6 +2649,7 @@
             <a:srgbClr val="111111"/>
           </a:solidFill>
           <a:latin typeface="+mn-lt"/>
+          <a:cs typeface="+mn-cs"/>
         </a:defRPr>
       </a:lvl9pPr>
     </p:otherStyle>
@@ -2922,12 +2980,12 @@
       <a:majorFont>
         <a:latin typeface="Arial"/>
         <a:ea typeface=""/>
-        <a:cs typeface=""/>
+        <a:cs typeface="Arial"/>
       </a:majorFont>
       <a:minorFont>
         <a:latin typeface="Arial"/>
         <a:ea typeface=""/>
-        <a:cs typeface=""/>
+        <a:cs typeface="Arial"/>
       </a:minorFont>
     </a:fontScheme>
     <a:fmtScheme name="swiss">
